--- a/Slides/Applications/Pose_Applications_01.pptx
+++ b/Slides/Applications/Pose_Applications_01.pptx
@@ -7906,7 +7906,7 @@
                 <a:cs typeface="Calibri"/>
                 <a:sym typeface="Calibri"/>
               </a:rPr>
-              <a:t>Pose Representation</a:t>
+              <a:t>Pose Applications</a:t>
             </a:r>
             <a:endParaRPr sz="8600" dirty="0">
               <a:latin typeface="Calibri"/>
@@ -7959,7 +7959,7 @@
                 <a:cs typeface="Calibri"/>
                 <a:sym typeface="Calibri"/>
               </a:rPr>
-              <a:t>Formalisms for the three Pose types and their decorations.</a:t>
+              <a:t>What applications use Poses and how?</a:t>
             </a:r>
             <a:endParaRPr sz="2060" dirty="0">
               <a:latin typeface="Calibri"/>
@@ -8098,13 +8098,22 @@
               <a:buNone/>
             </a:pPr>
             <a:r>
+              <a:rPr lang="en-US" dirty="0">
+                <a:latin typeface="Calibri"/>
+                <a:ea typeface="Calibri"/>
+                <a:cs typeface="Calibri"/>
+                <a:sym typeface="Calibri"/>
+              </a:rPr>
+              <a:t>Applications</a:t>
+            </a:r>
+            <a:r>
               <a:rPr lang="en" dirty="0">
                 <a:latin typeface="Calibri"/>
                 <a:ea typeface="Calibri"/>
                 <a:cs typeface="Calibri"/>
                 <a:sym typeface="Calibri"/>
               </a:rPr>
-              <a:t>Representation-01</a:t>
+              <a:t>-01</a:t>
             </a:r>
             <a:endParaRPr dirty="0">
               <a:latin typeface="Calibri"/>
@@ -8217,13 +8226,22 @@
               <a:buNone/>
             </a:pPr>
             <a:r>
+              <a:rPr lang="en-US" dirty="0">
+                <a:latin typeface="Calibri"/>
+                <a:ea typeface="Calibri"/>
+                <a:cs typeface="Calibri"/>
+                <a:sym typeface="Calibri"/>
+              </a:rPr>
+              <a:t>Applications</a:t>
+            </a:r>
+            <a:r>
               <a:rPr lang="en" dirty="0">
                 <a:latin typeface="Calibri"/>
                 <a:ea typeface="Calibri"/>
                 <a:cs typeface="Calibri"/>
                 <a:sym typeface="Calibri"/>
               </a:rPr>
-              <a:t>Representation-01</a:t>
+              <a:t>-01</a:t>
             </a:r>
             <a:endParaRPr dirty="0">
               <a:latin typeface="Calibri"/>
@@ -8336,13 +8354,22 @@
               <a:buNone/>
             </a:pPr>
             <a:r>
+              <a:rPr lang="en-US" dirty="0">
+                <a:latin typeface="Calibri"/>
+                <a:ea typeface="Calibri"/>
+                <a:cs typeface="Calibri"/>
+                <a:sym typeface="Calibri"/>
+              </a:rPr>
+              <a:t>Applications</a:t>
+            </a:r>
+            <a:r>
               <a:rPr lang="en" dirty="0">
                 <a:latin typeface="Calibri"/>
                 <a:ea typeface="Calibri"/>
                 <a:cs typeface="Calibri"/>
                 <a:sym typeface="Calibri"/>
               </a:rPr>
-              <a:t>Representation-01</a:t>
+              <a:t>-01</a:t>
             </a:r>
             <a:endParaRPr dirty="0">
               <a:latin typeface="Calibri"/>
@@ -8455,13 +8482,22 @@
               <a:buNone/>
             </a:pPr>
             <a:r>
+              <a:rPr lang="en-US" dirty="0">
+                <a:latin typeface="Calibri"/>
+                <a:ea typeface="Calibri"/>
+                <a:cs typeface="Calibri"/>
+                <a:sym typeface="Calibri"/>
+              </a:rPr>
+              <a:t>Applications</a:t>
+            </a:r>
+            <a:r>
               <a:rPr lang="en" dirty="0">
                 <a:latin typeface="Calibri"/>
                 <a:ea typeface="Calibri"/>
                 <a:cs typeface="Calibri"/>
                 <a:sym typeface="Calibri"/>
               </a:rPr>
-              <a:t>Representation-01</a:t>
+              <a:t>-01</a:t>
             </a:r>
             <a:endParaRPr dirty="0">
               <a:latin typeface="Calibri"/>
@@ -8574,13 +8610,22 @@
               <a:buNone/>
             </a:pPr>
             <a:r>
+              <a:rPr lang="en-US" dirty="0">
+                <a:latin typeface="Calibri"/>
+                <a:ea typeface="Calibri"/>
+                <a:cs typeface="Calibri"/>
+                <a:sym typeface="Calibri"/>
+              </a:rPr>
+              <a:t>Applications</a:t>
+            </a:r>
+            <a:r>
               <a:rPr lang="en" dirty="0">
                 <a:latin typeface="Calibri"/>
                 <a:ea typeface="Calibri"/>
                 <a:cs typeface="Calibri"/>
                 <a:sym typeface="Calibri"/>
               </a:rPr>
-              <a:t>Representation-01</a:t>
+              <a:t>-01</a:t>
             </a:r>
             <a:endParaRPr dirty="0">
               <a:latin typeface="Calibri"/>
@@ -8693,13 +8738,22 @@
               <a:buNone/>
             </a:pPr>
             <a:r>
+              <a:rPr lang="en-US" dirty="0">
+                <a:latin typeface="Calibri"/>
+                <a:ea typeface="Calibri"/>
+                <a:cs typeface="Calibri"/>
+                <a:sym typeface="Calibri"/>
+              </a:rPr>
+              <a:t>Applications</a:t>
+            </a:r>
+            <a:r>
               <a:rPr lang="en" dirty="0">
                 <a:latin typeface="Calibri"/>
                 <a:ea typeface="Calibri"/>
                 <a:cs typeface="Calibri"/>
                 <a:sym typeface="Calibri"/>
               </a:rPr>
-              <a:t>Representation-01</a:t>
+              <a:t>-01</a:t>
             </a:r>
             <a:endParaRPr dirty="0">
               <a:latin typeface="Calibri"/>
@@ -8812,13 +8866,22 @@
               <a:buNone/>
             </a:pPr>
             <a:r>
+              <a:rPr lang="en-US" dirty="0">
+                <a:latin typeface="Calibri"/>
+                <a:ea typeface="Calibri"/>
+                <a:cs typeface="Calibri"/>
+                <a:sym typeface="Calibri"/>
+              </a:rPr>
+              <a:t>Applications</a:t>
+            </a:r>
+            <a:r>
               <a:rPr lang="en" dirty="0">
                 <a:latin typeface="Calibri"/>
                 <a:ea typeface="Calibri"/>
                 <a:cs typeface="Calibri"/>
                 <a:sym typeface="Calibri"/>
               </a:rPr>
-              <a:t>Representation-01</a:t>
+              <a:t>-01</a:t>
             </a:r>
             <a:endParaRPr dirty="0">
               <a:latin typeface="Calibri"/>
@@ -8931,13 +8994,22 @@
               <a:buNone/>
             </a:pPr>
             <a:r>
+              <a:rPr lang="en-US" dirty="0">
+                <a:latin typeface="Calibri"/>
+                <a:ea typeface="Calibri"/>
+                <a:cs typeface="Calibri"/>
+                <a:sym typeface="Calibri"/>
+              </a:rPr>
+              <a:t>Applications</a:t>
+            </a:r>
+            <a:r>
               <a:rPr lang="en" dirty="0">
                 <a:latin typeface="Calibri"/>
                 <a:ea typeface="Calibri"/>
                 <a:cs typeface="Calibri"/>
                 <a:sym typeface="Calibri"/>
               </a:rPr>
-              <a:t>Representation-01</a:t>
+              <a:t>-01</a:t>
             </a:r>
             <a:endParaRPr dirty="0">
               <a:latin typeface="Calibri"/>
@@ -9192,13 +9264,22 @@
               <a:buNone/>
             </a:pPr>
             <a:r>
+              <a:rPr lang="en-US" dirty="0">
+                <a:latin typeface="Calibri"/>
+                <a:ea typeface="Calibri"/>
+                <a:cs typeface="Calibri"/>
+                <a:sym typeface="Calibri"/>
+              </a:rPr>
+              <a:t>Applications</a:t>
+            </a:r>
+            <a:r>
               <a:rPr lang="en" dirty="0">
                 <a:latin typeface="Calibri"/>
                 <a:ea typeface="Calibri"/>
                 <a:cs typeface="Calibri"/>
                 <a:sym typeface="Calibri"/>
               </a:rPr>
-              <a:t>Representation-01</a:t>
+              <a:t>-01</a:t>
             </a:r>
             <a:endParaRPr dirty="0">
               <a:latin typeface="Calibri"/>
@@ -9230,7 +9311,10 @@
           <a:bodyPr/>
           <a:lstStyle/>
           <a:p>
-            <a:endParaRPr lang="en-US"/>
+            <a:r>
+              <a:rPr lang="en-US" dirty="0"/>
+              <a:t>Poses are a natural aspect of many applications.</a:t>
+            </a:r>
           </a:p>
         </p:txBody>
       </p:sp>
@@ -9306,13 +9390,22 @@
               <a:buNone/>
             </a:pPr>
             <a:r>
+              <a:rPr lang="en-US" dirty="0">
+                <a:latin typeface="Calibri"/>
+                <a:ea typeface="Calibri"/>
+                <a:cs typeface="Calibri"/>
+                <a:sym typeface="Calibri"/>
+              </a:rPr>
+              <a:t>Applications</a:t>
+            </a:r>
+            <a:r>
               <a:rPr lang="en" dirty="0">
                 <a:latin typeface="Calibri"/>
                 <a:ea typeface="Calibri"/>
                 <a:cs typeface="Calibri"/>
                 <a:sym typeface="Calibri"/>
               </a:rPr>
-              <a:t>Representation-01</a:t>
+              <a:t>-01</a:t>
             </a:r>
             <a:endParaRPr dirty="0">
               <a:latin typeface="Calibri"/>
@@ -9341,10 +9434,85 @@
         </p:nvSpPr>
         <p:spPr/>
         <p:txBody>
-          <a:bodyPr/>
+          <a:bodyPr>
+            <a:normAutofit fontScale="25000" lnSpcReduction="20000"/>
+          </a:bodyPr>
           <a:lstStyle/>
           <a:p>
-            <a:endParaRPr lang="en-US"/>
+            <a:r>
+              <a:rPr lang="en-US" dirty="0"/>
+              <a:t>How do Poses appear in applications</a:t>
+            </a:r>
+          </a:p>
+          <a:p>
+            <a:r>
+              <a:rPr lang="en-US" dirty="0"/>
+              <a:t>Describing, designating, depicting </a:t>
+            </a:r>
+            <a:r>
+              <a:rPr lang="en-US" dirty="0" err="1"/>
+              <a:t>decirating</a:t>
+            </a:r>
+            <a:r>
+              <a:rPr lang="en-US" dirty="0"/>
+              <a:t>, disguising, deconflicting  </a:t>
+            </a:r>
+            <a:r>
+              <a:rPr lang="en-US" dirty="0" err="1"/>
+              <a:t>onjects</a:t>
+            </a:r>
+            <a:endParaRPr lang="en-US" dirty="0"/>
+          </a:p>
+          <a:p>
+            <a:r>
+              <a:rPr lang="en-US" dirty="0"/>
+              <a:t>Describing</a:t>
+            </a:r>
+          </a:p>
+          <a:p>
+            <a:r>
+              <a:rPr lang="en-US" dirty="0"/>
+              <a:t>Designating</a:t>
+            </a:r>
+          </a:p>
+          <a:p>
+            <a:r>
+              <a:rPr lang="en-US" dirty="0"/>
+              <a:t>Depicting</a:t>
+            </a:r>
+          </a:p>
+          <a:p>
+            <a:r>
+              <a:rPr lang="en-US" dirty="0"/>
+              <a:t>Decorating</a:t>
+            </a:r>
+          </a:p>
+          <a:p>
+            <a:r>
+              <a:rPr lang="en-US" dirty="0"/>
+              <a:t>Disguising</a:t>
+            </a:r>
+          </a:p>
+          <a:p>
+            <a:r>
+              <a:rPr lang="en-US" dirty="0"/>
+              <a:t>Deconflicting</a:t>
+            </a:r>
+          </a:p>
+          <a:p>
+            <a:r>
+              <a:rPr lang="en-US"/>
+              <a:t>Avatar replacement</a:t>
+            </a:r>
+          </a:p>
+          <a:p>
+            <a:endParaRPr lang="en-US" dirty="0"/>
+          </a:p>
+          <a:p>
+            <a:endParaRPr lang="en-US" dirty="0"/>
+          </a:p>
+          <a:p>
+            <a:endParaRPr lang="en-US" dirty="0"/>
           </a:p>
         </p:txBody>
       </p:sp>
@@ -9425,13 +9593,22 @@
               <a:buNone/>
             </a:pPr>
             <a:r>
+              <a:rPr lang="en-US" dirty="0">
+                <a:latin typeface="Calibri"/>
+                <a:ea typeface="Calibri"/>
+                <a:cs typeface="Calibri"/>
+                <a:sym typeface="Calibri"/>
+              </a:rPr>
+              <a:t>Applications</a:t>
+            </a:r>
+            <a:r>
               <a:rPr lang="en" dirty="0">
                 <a:latin typeface="Calibri"/>
                 <a:ea typeface="Calibri"/>
                 <a:cs typeface="Calibri"/>
                 <a:sym typeface="Calibri"/>
               </a:rPr>
-              <a:t>Representation-01</a:t>
+              <a:t>-01</a:t>
             </a:r>
             <a:endParaRPr dirty="0">
               <a:latin typeface="Calibri"/>
@@ -9544,13 +9721,22 @@
               <a:buNone/>
             </a:pPr>
             <a:r>
+              <a:rPr lang="en-US" dirty="0">
+                <a:latin typeface="Calibri"/>
+                <a:ea typeface="Calibri"/>
+                <a:cs typeface="Calibri"/>
+                <a:sym typeface="Calibri"/>
+              </a:rPr>
+              <a:t>Applications</a:t>
+            </a:r>
+            <a:r>
               <a:rPr lang="en" dirty="0">
                 <a:latin typeface="Calibri"/>
                 <a:ea typeface="Calibri"/>
                 <a:cs typeface="Calibri"/>
                 <a:sym typeface="Calibri"/>
               </a:rPr>
-              <a:t>Representation-01</a:t>
+              <a:t>-01</a:t>
             </a:r>
             <a:endParaRPr dirty="0">
               <a:latin typeface="Calibri"/>
@@ -9663,13 +9849,22 @@
               <a:buNone/>
             </a:pPr>
             <a:r>
+              <a:rPr lang="en-US" dirty="0">
+                <a:latin typeface="Calibri"/>
+                <a:ea typeface="Calibri"/>
+                <a:cs typeface="Calibri"/>
+                <a:sym typeface="Calibri"/>
+              </a:rPr>
+              <a:t>Applications</a:t>
+            </a:r>
+            <a:r>
               <a:rPr lang="en" dirty="0">
                 <a:latin typeface="Calibri"/>
                 <a:ea typeface="Calibri"/>
                 <a:cs typeface="Calibri"/>
                 <a:sym typeface="Calibri"/>
               </a:rPr>
-              <a:t>Representation-01</a:t>
+              <a:t>-01</a:t>
             </a:r>
             <a:endParaRPr dirty="0">
               <a:latin typeface="Calibri"/>
@@ -9782,13 +9977,22 @@
               <a:buNone/>
             </a:pPr>
             <a:r>
+              <a:rPr lang="en-US" dirty="0">
+                <a:latin typeface="Calibri"/>
+                <a:ea typeface="Calibri"/>
+                <a:cs typeface="Calibri"/>
+                <a:sym typeface="Calibri"/>
+              </a:rPr>
+              <a:t>Applications</a:t>
+            </a:r>
+            <a:r>
               <a:rPr lang="en" dirty="0">
                 <a:latin typeface="Calibri"/>
                 <a:ea typeface="Calibri"/>
                 <a:cs typeface="Calibri"/>
                 <a:sym typeface="Calibri"/>
               </a:rPr>
-              <a:t>Representation-01</a:t>
+              <a:t>-01</a:t>
             </a:r>
             <a:endParaRPr dirty="0">
               <a:latin typeface="Calibri"/>
@@ -9901,13 +10105,22 @@
               <a:buNone/>
             </a:pPr>
             <a:r>
+              <a:rPr lang="en-US" dirty="0">
+                <a:latin typeface="Calibri"/>
+                <a:ea typeface="Calibri"/>
+                <a:cs typeface="Calibri"/>
+                <a:sym typeface="Calibri"/>
+              </a:rPr>
+              <a:t>Applications</a:t>
+            </a:r>
+            <a:r>
               <a:rPr lang="en" dirty="0">
                 <a:latin typeface="Calibri"/>
                 <a:ea typeface="Calibri"/>
                 <a:cs typeface="Calibri"/>
                 <a:sym typeface="Calibri"/>
               </a:rPr>
-              <a:t>Representation-01</a:t>
+              <a:t>-01</a:t>
             </a:r>
             <a:endParaRPr dirty="0">
               <a:latin typeface="Calibri"/>
